--- a/Presentacion_Sistema_Contable_ElRoble_Actualizada.pptx
+++ b/Presentacion_Sistema_Contable_ElRoble_Actualizada.pptx
@@ -9070,7 +9070,7 @@
               </a:defRPr>
             </a:pPr>
             <a:r>
-              <a:t>Los 8 Indicadores Financieros (Distribuidora Industrial Andina S.A.)</a:t>
+              <a:t>Los 8 Indicadores Financieros (Distribuidora Comercial El Roble S.A.)</a:t>
             </a:r>
           </a:p>
         </p:txBody>

--- a/Presentacion_Sistema_Contable_ElRoble_Actualizada.pptx
+++ b/Presentacion_Sistema_Contable_ElRoble_Actualizada.pptx
@@ -7819,7 +7819,7 @@
               </a:defRPr>
             </a:pPr>
             <a:r>
-              <a:t>Hoja de Trabajo de 10 Columnas y Estados Financieros Clasificados</a:t>
+              <a:t>Hoja de Trabajo y Balance General (Balance Financiero)</a:t>
             </a:r>
           </a:p>
         </p:txBody>
